--- a/RedDot(new).pptx
+++ b/RedDot(new).pptx
@@ -109,7 +109,41 @@
       </a:defRPr>
     </a:lvl9pPr>
   </p:defaultTextStyle>
+  <p:extLst>
+    <p:ext uri="{EFAFB233-063F-42B5-8137-9DF3F51BA10A}">
+      <p15:sldGuideLst xmlns:p15="http://schemas.microsoft.com/office/powerpoint/2012/main"/>
+    </p:ext>
+  </p:extLst>
 </p:presentation>
+</file>
+
+<file path=ppt/changesInfos/changesInfo1.xml><?xml version="1.0" encoding="utf-8"?>
+<pc:chgInfo xmlns:a="http://schemas.openxmlformats.org/drawingml/2006/main" xmlns:r="http://schemas.openxmlformats.org/officeDocument/2006/relationships" xmlns:ac="http://schemas.microsoft.com/office/drawing/2013/main/command" xmlns:pc="http://schemas.microsoft.com/office/powerpoint/2013/main/command">
+  <pc:docChgLst>
+    <pc:chgData name="insha mehfooz" userId="5a80903252a027e6" providerId="LiveId" clId="{7A7A2CCB-4B77-4F53-A30E-684D215237F6}"/>
+    <pc:docChg chg="modSld">
+      <pc:chgData name="insha mehfooz" userId="5a80903252a027e6" providerId="LiveId" clId="{7A7A2CCB-4B77-4F53-A30E-684D215237F6}" dt="2026-09-11T06:08:35.283" v="2" actId="1076"/>
+      <pc:docMkLst>
+        <pc:docMk/>
+      </pc:docMkLst>
+      <pc:sldChg chg="modSp mod">
+        <pc:chgData name="insha mehfooz" userId="5a80903252a027e6" providerId="LiveId" clId="{7A7A2CCB-4B77-4F53-A30E-684D215237F6}" dt="2026-09-11T06:08:35.283" v="2" actId="1076"/>
+        <pc:sldMkLst>
+          <pc:docMk/>
+          <pc:sldMk cId="669893473" sldId="258"/>
+        </pc:sldMkLst>
+        <pc:picChg chg="mod">
+          <ac:chgData name="insha mehfooz" userId="5a80903252a027e6" providerId="LiveId" clId="{7A7A2CCB-4B77-4F53-A30E-684D215237F6}" dt="2026-09-11T06:08:35.283" v="2" actId="1076"/>
+          <ac:picMkLst>
+            <pc:docMk/>
+            <pc:sldMk cId="669893473" sldId="258"/>
+            <ac:picMk id="3" creationId="{BEF9BDD2-C657-D154-9B95-3A207C76399B}"/>
+          </ac:picMkLst>
+        </pc:picChg>
+      </pc:sldChg>
+    </pc:docChg>
+  </pc:docChgLst>
+</pc:chgInfo>
 </file>
 
 <file path=ppt/slideLayouts/slideLayout1.xml><?xml version="1.0" encoding="utf-8"?>
@@ -261,7 +295,7 @@
           <a:p>
             <a:fld id="{10468388-51A9-41E2-95B5-A5B882131529}" type="datetimeFigureOut">
               <a:rPr lang="en-IN" smtClean="0"/>
-              <a:t>02-09-2026</a:t>
+              <a:t>11-09-2026</a:t>
             </a:fld>
             <a:endParaRPr lang="en-IN"/>
           </a:p>
@@ -461,7 +495,7 @@
           <a:p>
             <a:fld id="{10468388-51A9-41E2-95B5-A5B882131529}" type="datetimeFigureOut">
               <a:rPr lang="en-IN" smtClean="0"/>
-              <a:t>02-09-2026</a:t>
+              <a:t>11-09-2026</a:t>
             </a:fld>
             <a:endParaRPr lang="en-IN"/>
           </a:p>
@@ -671,7 +705,7 @@
           <a:p>
             <a:fld id="{10468388-51A9-41E2-95B5-A5B882131529}" type="datetimeFigureOut">
               <a:rPr lang="en-IN" smtClean="0"/>
-              <a:t>02-09-2026</a:t>
+              <a:t>11-09-2026</a:t>
             </a:fld>
             <a:endParaRPr lang="en-IN"/>
           </a:p>
@@ -871,7 +905,7 @@
           <a:p>
             <a:fld id="{10468388-51A9-41E2-95B5-A5B882131529}" type="datetimeFigureOut">
               <a:rPr lang="en-IN" smtClean="0"/>
-              <a:t>02-09-2026</a:t>
+              <a:t>11-09-2026</a:t>
             </a:fld>
             <a:endParaRPr lang="en-IN"/>
           </a:p>
@@ -1147,7 +1181,7 @@
           <a:p>
             <a:fld id="{10468388-51A9-41E2-95B5-A5B882131529}" type="datetimeFigureOut">
               <a:rPr lang="en-IN" smtClean="0"/>
-              <a:t>02-09-2026</a:t>
+              <a:t>11-09-2026</a:t>
             </a:fld>
             <a:endParaRPr lang="en-IN"/>
           </a:p>
@@ -1415,7 +1449,7 @@
           <a:p>
             <a:fld id="{10468388-51A9-41E2-95B5-A5B882131529}" type="datetimeFigureOut">
               <a:rPr lang="en-IN" smtClean="0"/>
-              <a:t>02-09-2026</a:t>
+              <a:t>11-09-2026</a:t>
             </a:fld>
             <a:endParaRPr lang="en-IN"/>
           </a:p>
@@ -1830,7 +1864,7 @@
           <a:p>
             <a:fld id="{10468388-51A9-41E2-95B5-A5B882131529}" type="datetimeFigureOut">
               <a:rPr lang="en-IN" smtClean="0"/>
-              <a:t>02-09-2026</a:t>
+              <a:t>11-09-2026</a:t>
             </a:fld>
             <a:endParaRPr lang="en-IN"/>
           </a:p>
@@ -1972,7 +2006,7 @@
           <a:p>
             <a:fld id="{10468388-51A9-41E2-95B5-A5B882131529}" type="datetimeFigureOut">
               <a:rPr lang="en-IN" smtClean="0"/>
-              <a:t>02-09-2026</a:t>
+              <a:t>11-09-2026</a:t>
             </a:fld>
             <a:endParaRPr lang="en-IN"/>
           </a:p>
@@ -2085,7 +2119,7 @@
           <a:p>
             <a:fld id="{10468388-51A9-41E2-95B5-A5B882131529}" type="datetimeFigureOut">
               <a:rPr lang="en-IN" smtClean="0"/>
-              <a:t>02-09-2026</a:t>
+              <a:t>11-09-2026</a:t>
             </a:fld>
             <a:endParaRPr lang="en-IN"/>
           </a:p>
@@ -2398,7 +2432,7 @@
           <a:p>
             <a:fld id="{10468388-51A9-41E2-95B5-A5B882131529}" type="datetimeFigureOut">
               <a:rPr lang="en-IN" smtClean="0"/>
-              <a:t>02-09-2026</a:t>
+              <a:t>11-09-2026</a:t>
             </a:fld>
             <a:endParaRPr lang="en-IN"/>
           </a:p>
@@ -2687,7 +2721,7 @@
           <a:p>
             <a:fld id="{10468388-51A9-41E2-95B5-A5B882131529}" type="datetimeFigureOut">
               <a:rPr lang="en-IN" smtClean="0"/>
-              <a:t>02-09-2026</a:t>
+              <a:t>11-09-2026</a:t>
             </a:fld>
             <a:endParaRPr lang="en-IN"/>
           </a:p>
@@ -2930,7 +2964,7 @@
           <a:p>
             <a:fld id="{10468388-51A9-41E2-95B5-A5B882131529}" type="datetimeFigureOut">
               <a:rPr lang="en-IN" smtClean="0"/>
-              <a:t>02-09-2026</a:t>
+              <a:t>11-09-2026</a:t>
             </a:fld>
             <a:endParaRPr lang="en-IN"/>
           </a:p>
@@ -3557,7 +3591,7 @@
         </p:blipFill>
         <p:spPr>
           <a:xfrm>
-            <a:off x="0" y="26581"/>
+            <a:off x="0" y="102118"/>
             <a:ext cx="12104288" cy="6755882"/>
           </a:xfrm>
           <a:prstGeom prst="rect">

--- a/RedDot(new).pptx
+++ b/RedDot(new).pptx
@@ -115,35 +115,6 @@
     </p:ext>
   </p:extLst>
 </p:presentation>
-</file>
-
-<file path=ppt/changesInfos/changesInfo1.xml><?xml version="1.0" encoding="utf-8"?>
-<pc:chgInfo xmlns:a="http://schemas.openxmlformats.org/drawingml/2006/main" xmlns:r="http://schemas.openxmlformats.org/officeDocument/2006/relationships" xmlns:ac="http://schemas.microsoft.com/office/drawing/2013/main/command" xmlns:pc="http://schemas.microsoft.com/office/powerpoint/2013/main/command">
-  <pc:docChgLst>
-    <pc:chgData name="insha mehfooz" userId="5a80903252a027e6" providerId="LiveId" clId="{7A7A2CCB-4B77-4F53-A30E-684D215237F6}"/>
-    <pc:docChg chg="modSld">
-      <pc:chgData name="insha mehfooz" userId="5a80903252a027e6" providerId="LiveId" clId="{7A7A2CCB-4B77-4F53-A30E-684D215237F6}" dt="2026-09-11T06:08:35.283" v="2" actId="1076"/>
-      <pc:docMkLst>
-        <pc:docMk/>
-      </pc:docMkLst>
-      <pc:sldChg chg="modSp mod">
-        <pc:chgData name="insha mehfooz" userId="5a80903252a027e6" providerId="LiveId" clId="{7A7A2CCB-4B77-4F53-A30E-684D215237F6}" dt="2026-09-11T06:08:35.283" v="2" actId="1076"/>
-        <pc:sldMkLst>
-          <pc:docMk/>
-          <pc:sldMk cId="669893473" sldId="258"/>
-        </pc:sldMkLst>
-        <pc:picChg chg="mod">
-          <ac:chgData name="insha mehfooz" userId="5a80903252a027e6" providerId="LiveId" clId="{7A7A2CCB-4B77-4F53-A30E-684D215237F6}" dt="2026-09-11T06:08:35.283" v="2" actId="1076"/>
-          <ac:picMkLst>
-            <pc:docMk/>
-            <pc:sldMk cId="669893473" sldId="258"/>
-            <ac:picMk id="3" creationId="{BEF9BDD2-C657-D154-9B95-3A207C76399B}"/>
-          </ac:picMkLst>
-        </pc:picChg>
-      </pc:sldChg>
-    </pc:docChg>
-  </pc:docChgLst>
-</pc:chgInfo>
 </file>
 
 <file path=ppt/slideLayouts/slideLayout1.xml><?xml version="1.0" encoding="utf-8"?>
@@ -3565,10 +3536,10 @@
       </p:grpSpPr>
       <p:pic>
         <p:nvPicPr>
-          <p:cNvPr id="3" name="Picture 2">
-            <a:extLst>
-              <a:ext uri="{FF2B5EF4-FFF2-40B4-BE49-F238E27FC236}">
-                <a16:creationId xmlns:a16="http://schemas.microsoft.com/office/drawing/2014/main" id="{BEF9BDD2-C657-D154-9B95-3A207C76399B}"/>
+          <p:cNvPr id="4" name="Picture 3">
+            <a:extLst>
+              <a:ext uri="{FF2B5EF4-FFF2-40B4-BE49-F238E27FC236}">
+                <a16:creationId xmlns:a16="http://schemas.microsoft.com/office/drawing/2014/main" id="{C781F781-02C2-AED4-D740-1B01EC9BC50F}"/>
               </a:ext>
             </a:extLst>
           </p:cNvPr>
@@ -3591,8 +3562,8 @@
         </p:blipFill>
         <p:spPr>
           <a:xfrm>
-            <a:off x="0" y="102118"/>
-            <a:ext cx="12104288" cy="6755882"/>
+            <a:off x="0" y="24939"/>
+            <a:ext cx="12192000" cy="6808121"/>
           </a:xfrm>
           <a:prstGeom prst="rect">
             <a:avLst/>

--- a/RedDot(new).pptx
+++ b/RedDot(new).pptx
@@ -115,6 +115,35 @@
     </p:ext>
   </p:extLst>
 </p:presentation>
+</file>
+
+<file path=ppt/changesInfos/changesInfo1.xml><?xml version="1.0" encoding="utf-8"?>
+<pc:chgInfo xmlns:a="http://schemas.openxmlformats.org/drawingml/2006/main" xmlns:r="http://schemas.openxmlformats.org/officeDocument/2006/relationships" xmlns:ac="http://schemas.microsoft.com/office/drawing/2013/main/command" xmlns:pc="http://schemas.microsoft.com/office/powerpoint/2013/main/command">
+  <pc:docChgLst>
+    <pc:chgData name="insha mehfooz" userId="5a80903252a027e6" providerId="LiveId" clId="{7A7A2CCB-4B77-4F53-A30E-684D215237F6}"/>
+    <pc:docChg chg="modSld">
+      <pc:chgData name="insha mehfooz" userId="5a80903252a027e6" providerId="LiveId" clId="{7A7A2CCB-4B77-4F53-A30E-684D215237F6}" dt="2026-09-11T06:08:35.283" v="2" actId="1076"/>
+      <pc:docMkLst>
+        <pc:docMk/>
+      </pc:docMkLst>
+      <pc:sldChg chg="modSp mod">
+        <pc:chgData name="insha mehfooz" userId="5a80903252a027e6" providerId="LiveId" clId="{7A7A2CCB-4B77-4F53-A30E-684D215237F6}" dt="2026-09-11T06:08:35.283" v="2" actId="1076"/>
+        <pc:sldMkLst>
+          <pc:docMk/>
+          <pc:sldMk cId="669893473" sldId="258"/>
+        </pc:sldMkLst>
+        <pc:picChg chg="mod">
+          <ac:chgData name="insha mehfooz" userId="5a80903252a027e6" providerId="LiveId" clId="{7A7A2CCB-4B77-4F53-A30E-684D215237F6}" dt="2026-09-11T06:08:35.283" v="2" actId="1076"/>
+          <ac:picMkLst>
+            <pc:docMk/>
+            <pc:sldMk cId="669893473" sldId="258"/>
+            <ac:picMk id="3" creationId="{BEF9BDD2-C657-D154-9B95-3A207C76399B}"/>
+          </ac:picMkLst>
+        </pc:picChg>
+      </pc:sldChg>
+    </pc:docChg>
+  </pc:docChgLst>
+</pc:chgInfo>
 </file>
 
 <file path=ppt/slideLayouts/slideLayout1.xml><?xml version="1.0" encoding="utf-8"?>
@@ -3536,10 +3565,10 @@
       </p:grpSpPr>
       <p:pic>
         <p:nvPicPr>
-          <p:cNvPr id="4" name="Picture 3">
-            <a:extLst>
-              <a:ext uri="{FF2B5EF4-FFF2-40B4-BE49-F238E27FC236}">
-                <a16:creationId xmlns:a16="http://schemas.microsoft.com/office/drawing/2014/main" id="{C781F781-02C2-AED4-D740-1B01EC9BC50F}"/>
+          <p:cNvPr id="3" name="Picture 2">
+            <a:extLst>
+              <a:ext uri="{FF2B5EF4-FFF2-40B4-BE49-F238E27FC236}">
+                <a16:creationId xmlns:a16="http://schemas.microsoft.com/office/drawing/2014/main" id="{BEF9BDD2-C657-D154-9B95-3A207C76399B}"/>
               </a:ext>
             </a:extLst>
           </p:cNvPr>
@@ -3562,8 +3591,8 @@
         </p:blipFill>
         <p:spPr>
           <a:xfrm>
-            <a:off x="0" y="24939"/>
-            <a:ext cx="12192000" cy="6808121"/>
+            <a:off x="0" y="102118"/>
+            <a:ext cx="12104288" cy="6755882"/>
           </a:xfrm>
           <a:prstGeom prst="rect">
             <a:avLst/>
